--- a/presentation/hirewave_presentation.pptx
+++ b/presentation/hirewave_presentation.pptx
@@ -2,7 +2,7 @@
 <file path=ppt/presentation.xml><?xml version="1.0" encoding="utf-8"?>
 <p:presentation xmlns:a="http://schemas.openxmlformats.org/drawingml/2006/main" xmlns:r="http://schemas.openxmlformats.org/officeDocument/2006/relationships" xmlns:p="http://schemas.openxmlformats.org/presentationml/2006/main">
   <p:sldMasterIdLst>
-    <p:sldMasterId id="2147483648" r:id="rId17"/>
+    <p:sldMasterId id="2147483648" r:id="rId23"/>
   </p:sldMasterIdLst>
   <p:sldIdLst>
     <p:sldId id="256" r:id="rId1"/>
@@ -21,6 +21,12 @@
     <p:sldId id="269" r:id="rId14"/>
     <p:sldId id="270" r:id="rId15"/>
     <p:sldId id="271" r:id="rId16"/>
+    <p:sldId id="272" r:id="rId17"/>
+    <p:sldId id="273" r:id="rId18"/>
+    <p:sldId id="274" r:id="rId19"/>
+    <p:sldId id="275" r:id="rId20"/>
+    <p:sldId id="276" r:id="rId21"/>
+    <p:sldId id="277" r:id="rId22"/>
   </p:sldIdLst>
   <p:sldSz cx="12192000" cy="6858000" type="wide"/>
   <p:notesSz cx="6858000" cy="9144000"/>
@@ -483,6 +489,153 @@
 </p:sld>
 </file>
 
+<file path=ppt/slides/slide17.xml><?xml version="1.0" encoding="utf-8"?>
+<p:sld xmlns:a="http://schemas.openxmlformats.org/drawingml/2006/main" xmlns:r="http://schemas.openxmlformats.org/officeDocument/2006/relationships" xmlns:p="http://schemas.openxmlformats.org/presentationml/2006/main">
+  <p:cSld>
+    <p:spTree>
+      <p:nvGrpSpPr>
+        <p:cNvPr id="1" name=""/>
+        <p:cNvGrpSpPr/>
+        <p:nvPr/>
+      </p:nvGrpSpPr>
+      <p:grpSpPr>
+        <a:xfrm>
+          <a:off x="0" y="0"/>
+          <a:ext cx="0" cy="0"/>
+          <a:chOff x="0" y="0"/>
+          <a:chExt cx="0" cy="0"/>
+        </a:xfrm>
+      </p:grpSpPr>
+      <p:pic>
+        <p:nvPicPr>
+          <p:cNvPr id="2" name="Slide 17"/>
+          <p:cNvPicPr>
+            <a:picLocks noChangeAspect="1"/>
+          </p:cNvPicPr>
+          <p:nvPr/>
+        </p:nvPicPr>
+        <p:blipFill>
+          <a:blip r:embed="rId1"/>
+          <a:stretch>
+            <a:fillRect/>
+          </a:stretch>
+        </p:blipFill>
+        <p:spPr>
+          <a:xfrm>
+            <a:off x="0" y="0"/>
+            <a:ext cx="12192000" cy="6858000"/>
+          </a:xfrm>
+          <a:prstGeom prst="rect">
+            <a:avLst/>
+          </a:prstGeom>
+        </p:spPr>
+      </p:pic>
+    </p:spTree>
+  </p:cSld>
+  <p:clrMapOvr>
+    <a:masterClrMapping/>
+  </p:clrMapOvr>
+</p:sld>
+</file>
+
+<file path=ppt/slides/slide18.xml><?xml version="1.0" encoding="utf-8"?>
+<p:sld xmlns:a="http://schemas.openxmlformats.org/drawingml/2006/main" xmlns:r="http://schemas.openxmlformats.org/officeDocument/2006/relationships" xmlns:p="http://schemas.openxmlformats.org/presentationml/2006/main">
+  <p:cSld>
+    <p:spTree>
+      <p:nvGrpSpPr>
+        <p:cNvPr id="1" name=""/>
+        <p:cNvGrpSpPr/>
+        <p:nvPr/>
+      </p:nvGrpSpPr>
+      <p:grpSpPr>
+        <a:xfrm>
+          <a:off x="0" y="0"/>
+          <a:ext cx="0" cy="0"/>
+          <a:chOff x="0" y="0"/>
+          <a:chExt cx="0" cy="0"/>
+        </a:xfrm>
+      </p:grpSpPr>
+      <p:pic>
+        <p:nvPicPr>
+          <p:cNvPr id="2" name="Slide 18"/>
+          <p:cNvPicPr>
+            <a:picLocks noChangeAspect="1"/>
+          </p:cNvPicPr>
+          <p:nvPr/>
+        </p:nvPicPr>
+        <p:blipFill>
+          <a:blip r:embed="rId1"/>
+          <a:stretch>
+            <a:fillRect/>
+          </a:stretch>
+        </p:blipFill>
+        <p:spPr>
+          <a:xfrm>
+            <a:off x="0" y="0"/>
+            <a:ext cx="12192000" cy="6858000"/>
+          </a:xfrm>
+          <a:prstGeom prst="rect">
+            <a:avLst/>
+          </a:prstGeom>
+        </p:spPr>
+      </p:pic>
+    </p:spTree>
+  </p:cSld>
+  <p:clrMapOvr>
+    <a:masterClrMapping/>
+  </p:clrMapOvr>
+</p:sld>
+</file>
+
+<file path=ppt/slides/slide19.xml><?xml version="1.0" encoding="utf-8"?>
+<p:sld xmlns:a="http://schemas.openxmlformats.org/drawingml/2006/main" xmlns:r="http://schemas.openxmlformats.org/officeDocument/2006/relationships" xmlns:p="http://schemas.openxmlformats.org/presentationml/2006/main">
+  <p:cSld>
+    <p:spTree>
+      <p:nvGrpSpPr>
+        <p:cNvPr id="1" name=""/>
+        <p:cNvGrpSpPr/>
+        <p:nvPr/>
+      </p:nvGrpSpPr>
+      <p:grpSpPr>
+        <a:xfrm>
+          <a:off x="0" y="0"/>
+          <a:ext cx="0" cy="0"/>
+          <a:chOff x="0" y="0"/>
+          <a:chExt cx="0" cy="0"/>
+        </a:xfrm>
+      </p:grpSpPr>
+      <p:pic>
+        <p:nvPicPr>
+          <p:cNvPr id="2" name="Slide 19"/>
+          <p:cNvPicPr>
+            <a:picLocks noChangeAspect="1"/>
+          </p:cNvPicPr>
+          <p:nvPr/>
+        </p:nvPicPr>
+        <p:blipFill>
+          <a:blip r:embed="rId1"/>
+          <a:stretch>
+            <a:fillRect/>
+          </a:stretch>
+        </p:blipFill>
+        <p:spPr>
+          <a:xfrm>
+            <a:off x="0" y="0"/>
+            <a:ext cx="12192000" cy="6858000"/>
+          </a:xfrm>
+          <a:prstGeom prst="rect">
+            <a:avLst/>
+          </a:prstGeom>
+        </p:spPr>
+      </p:pic>
+    </p:spTree>
+  </p:cSld>
+  <p:clrMapOvr>
+    <a:masterClrMapping/>
+  </p:clrMapOvr>
+</p:sld>
+</file>
+
 <file path=ppt/slides/slide2.xml><?xml version="1.0" encoding="utf-8"?>
 <p:sld xmlns:a="http://schemas.openxmlformats.org/drawingml/2006/main" xmlns:r="http://schemas.openxmlformats.org/officeDocument/2006/relationships" xmlns:p="http://schemas.openxmlformats.org/presentationml/2006/main">
   <p:cSld>
@@ -503,6 +656,153 @@
       <p:pic>
         <p:nvPicPr>
           <p:cNvPr id="2" name="Slide 2"/>
+          <p:cNvPicPr>
+            <a:picLocks noChangeAspect="1"/>
+          </p:cNvPicPr>
+          <p:nvPr/>
+        </p:nvPicPr>
+        <p:blipFill>
+          <a:blip r:embed="rId1"/>
+          <a:stretch>
+            <a:fillRect/>
+          </a:stretch>
+        </p:blipFill>
+        <p:spPr>
+          <a:xfrm>
+            <a:off x="0" y="0"/>
+            <a:ext cx="12192000" cy="6858000"/>
+          </a:xfrm>
+          <a:prstGeom prst="rect">
+            <a:avLst/>
+          </a:prstGeom>
+        </p:spPr>
+      </p:pic>
+    </p:spTree>
+  </p:cSld>
+  <p:clrMapOvr>
+    <a:masterClrMapping/>
+  </p:clrMapOvr>
+</p:sld>
+</file>
+
+<file path=ppt/slides/slide20.xml><?xml version="1.0" encoding="utf-8"?>
+<p:sld xmlns:a="http://schemas.openxmlformats.org/drawingml/2006/main" xmlns:r="http://schemas.openxmlformats.org/officeDocument/2006/relationships" xmlns:p="http://schemas.openxmlformats.org/presentationml/2006/main">
+  <p:cSld>
+    <p:spTree>
+      <p:nvGrpSpPr>
+        <p:cNvPr id="1" name=""/>
+        <p:cNvGrpSpPr/>
+        <p:nvPr/>
+      </p:nvGrpSpPr>
+      <p:grpSpPr>
+        <a:xfrm>
+          <a:off x="0" y="0"/>
+          <a:ext cx="0" cy="0"/>
+          <a:chOff x="0" y="0"/>
+          <a:chExt cx="0" cy="0"/>
+        </a:xfrm>
+      </p:grpSpPr>
+      <p:pic>
+        <p:nvPicPr>
+          <p:cNvPr id="2" name="Slide 20"/>
+          <p:cNvPicPr>
+            <a:picLocks noChangeAspect="1"/>
+          </p:cNvPicPr>
+          <p:nvPr/>
+        </p:nvPicPr>
+        <p:blipFill>
+          <a:blip r:embed="rId1"/>
+          <a:stretch>
+            <a:fillRect/>
+          </a:stretch>
+        </p:blipFill>
+        <p:spPr>
+          <a:xfrm>
+            <a:off x="0" y="0"/>
+            <a:ext cx="12192000" cy="6858000"/>
+          </a:xfrm>
+          <a:prstGeom prst="rect">
+            <a:avLst/>
+          </a:prstGeom>
+        </p:spPr>
+      </p:pic>
+    </p:spTree>
+  </p:cSld>
+  <p:clrMapOvr>
+    <a:masterClrMapping/>
+  </p:clrMapOvr>
+</p:sld>
+</file>
+
+<file path=ppt/slides/slide21.xml><?xml version="1.0" encoding="utf-8"?>
+<p:sld xmlns:a="http://schemas.openxmlformats.org/drawingml/2006/main" xmlns:r="http://schemas.openxmlformats.org/officeDocument/2006/relationships" xmlns:p="http://schemas.openxmlformats.org/presentationml/2006/main">
+  <p:cSld>
+    <p:spTree>
+      <p:nvGrpSpPr>
+        <p:cNvPr id="1" name=""/>
+        <p:cNvGrpSpPr/>
+        <p:nvPr/>
+      </p:nvGrpSpPr>
+      <p:grpSpPr>
+        <a:xfrm>
+          <a:off x="0" y="0"/>
+          <a:ext cx="0" cy="0"/>
+          <a:chOff x="0" y="0"/>
+          <a:chExt cx="0" cy="0"/>
+        </a:xfrm>
+      </p:grpSpPr>
+      <p:pic>
+        <p:nvPicPr>
+          <p:cNvPr id="2" name="Slide 21"/>
+          <p:cNvPicPr>
+            <a:picLocks noChangeAspect="1"/>
+          </p:cNvPicPr>
+          <p:nvPr/>
+        </p:nvPicPr>
+        <p:blipFill>
+          <a:blip r:embed="rId1"/>
+          <a:stretch>
+            <a:fillRect/>
+          </a:stretch>
+        </p:blipFill>
+        <p:spPr>
+          <a:xfrm>
+            <a:off x="0" y="0"/>
+            <a:ext cx="12192000" cy="6858000"/>
+          </a:xfrm>
+          <a:prstGeom prst="rect">
+            <a:avLst/>
+          </a:prstGeom>
+        </p:spPr>
+      </p:pic>
+    </p:spTree>
+  </p:cSld>
+  <p:clrMapOvr>
+    <a:masterClrMapping/>
+  </p:clrMapOvr>
+</p:sld>
+</file>
+
+<file path=ppt/slides/slide22.xml><?xml version="1.0" encoding="utf-8"?>
+<p:sld xmlns:a="http://schemas.openxmlformats.org/drawingml/2006/main" xmlns:r="http://schemas.openxmlformats.org/officeDocument/2006/relationships" xmlns:p="http://schemas.openxmlformats.org/presentationml/2006/main">
+  <p:cSld>
+    <p:spTree>
+      <p:nvGrpSpPr>
+        <p:cNvPr id="1" name=""/>
+        <p:cNvGrpSpPr/>
+        <p:nvPr/>
+      </p:nvGrpSpPr>
+      <p:grpSpPr>
+        <a:xfrm>
+          <a:off x="0" y="0"/>
+          <a:ext cx="0" cy="0"/>
+          <a:chOff x="0" y="0"/>
+          <a:chExt cx="0" cy="0"/>
+        </a:xfrm>
+      </p:grpSpPr>
+      <p:pic>
+        <p:nvPicPr>
+          <p:cNvPr id="2" name="Slide 22"/>
           <p:cNvPicPr>
             <a:picLocks noChangeAspect="1"/>
           </p:cNvPicPr>
